--- a/Picture/portada.pptx
+++ b/Picture/portada.pptx
@@ -104,6 +104,11 @@
       </a:defRPr>
     </a:lvl9pPr>
   </p:defaultTextStyle>
+  <p:extLst>
+    <p:ext uri="{EFAFB233-063F-42B5-8137-9DF3F51BA10A}">
+      <p15:sldGuideLst xmlns:p15="http://schemas.microsoft.com/office/powerpoint/2012/main"/>
+    </p:ext>
+  </p:extLst>
 </p:presentation>
 </file>
 
@@ -3456,8 +3461,8 @@
           </p:nvSpPr>
           <p:spPr>
             <a:xfrm>
-              <a:off x="3144748" y="4551338"/>
-              <a:ext cx="5986382" cy="1354217"/>
+              <a:off x="3181819" y="4663098"/>
+              <a:ext cx="5378524" cy="1261884"/>
             </a:xfrm>
             <a:prstGeom prst="rect">
               <a:avLst/>
@@ -3477,27 +3482,27 @@
             </a:p>
             <a:p>
               <a:r>
-                <a:rPr lang="en-US" sz="1900" dirty="0"/>
+                <a:rPr lang="en-US" sz="1700" dirty="0"/>
                 <a:t>Associate</a:t>
               </a:r>
               <a:r>
-                <a:rPr lang="pt-BR" sz="1900" dirty="0"/>
+                <a:rPr lang="pt-BR" sz="1700" dirty="0"/>
                 <a:t> Professor</a:t>
               </a:r>
             </a:p>
             <a:p>
               <a:r>
-                <a:rPr lang="en-US" sz="1900" dirty="0"/>
+                <a:rPr lang="en-US" sz="1700" dirty="0"/>
                 <a:t>Department</a:t>
               </a:r>
               <a:r>
-                <a:rPr lang="en-GB" sz="1900" dirty="0"/>
+                <a:rPr lang="en-GB" sz="1700" dirty="0"/>
                 <a:t> of Mathematical and Computational Sciences,</a:t>
               </a:r>
             </a:p>
             <a:p>
               <a:r>
-                <a:rPr lang="en-GB" sz="1900" dirty="0"/>
+                <a:rPr lang="en-GB" sz="1700" dirty="0"/>
                 <a:t>Yachay Tech University - UITEY</a:t>
               </a:r>
             </a:p>

--- a/Picture/portada.pptx
+++ b/Picture/portada.pptx
@@ -261,7 +261,7 @@
           <a:p>
             <a:fld id="{9B2269BD-2009-45FD-BF20-0C7340CF9594}" type="datetimeFigureOut">
               <a:rPr lang="en-GB" smtClean="0"/>
-              <a:t>26/02/2023</a:t>
+              <a:t>27/02/2023</a:t>
             </a:fld>
             <a:endParaRPr lang="en-GB"/>
           </a:p>
@@ -461,7 +461,7 @@
           <a:p>
             <a:fld id="{9B2269BD-2009-45FD-BF20-0C7340CF9594}" type="datetimeFigureOut">
               <a:rPr lang="en-GB" smtClean="0"/>
-              <a:t>26/02/2023</a:t>
+              <a:t>27/02/2023</a:t>
             </a:fld>
             <a:endParaRPr lang="en-GB"/>
           </a:p>
@@ -671,7 +671,7 @@
           <a:p>
             <a:fld id="{9B2269BD-2009-45FD-BF20-0C7340CF9594}" type="datetimeFigureOut">
               <a:rPr lang="en-GB" smtClean="0"/>
-              <a:t>26/02/2023</a:t>
+              <a:t>27/02/2023</a:t>
             </a:fld>
             <a:endParaRPr lang="en-GB"/>
           </a:p>
@@ -871,7 +871,7 @@
           <a:p>
             <a:fld id="{9B2269BD-2009-45FD-BF20-0C7340CF9594}" type="datetimeFigureOut">
               <a:rPr lang="en-GB" smtClean="0"/>
-              <a:t>26/02/2023</a:t>
+              <a:t>27/02/2023</a:t>
             </a:fld>
             <a:endParaRPr lang="en-GB"/>
           </a:p>
@@ -1147,7 +1147,7 @@
           <a:p>
             <a:fld id="{9B2269BD-2009-45FD-BF20-0C7340CF9594}" type="datetimeFigureOut">
               <a:rPr lang="en-GB" smtClean="0"/>
-              <a:t>26/02/2023</a:t>
+              <a:t>27/02/2023</a:t>
             </a:fld>
             <a:endParaRPr lang="en-GB"/>
           </a:p>
@@ -1415,7 +1415,7 @@
           <a:p>
             <a:fld id="{9B2269BD-2009-45FD-BF20-0C7340CF9594}" type="datetimeFigureOut">
               <a:rPr lang="en-GB" smtClean="0"/>
-              <a:t>26/02/2023</a:t>
+              <a:t>27/02/2023</a:t>
             </a:fld>
             <a:endParaRPr lang="en-GB"/>
           </a:p>
@@ -1830,7 +1830,7 @@
           <a:p>
             <a:fld id="{9B2269BD-2009-45FD-BF20-0C7340CF9594}" type="datetimeFigureOut">
               <a:rPr lang="en-GB" smtClean="0"/>
-              <a:t>26/02/2023</a:t>
+              <a:t>27/02/2023</a:t>
             </a:fld>
             <a:endParaRPr lang="en-GB"/>
           </a:p>
@@ -1972,7 +1972,7 @@
           <a:p>
             <a:fld id="{9B2269BD-2009-45FD-BF20-0C7340CF9594}" type="datetimeFigureOut">
               <a:rPr lang="en-GB" smtClean="0"/>
-              <a:t>26/02/2023</a:t>
+              <a:t>27/02/2023</a:t>
             </a:fld>
             <a:endParaRPr lang="en-GB"/>
           </a:p>
@@ -2085,7 +2085,7 @@
           <a:p>
             <a:fld id="{9B2269BD-2009-45FD-BF20-0C7340CF9594}" type="datetimeFigureOut">
               <a:rPr lang="en-GB" smtClean="0"/>
-              <a:t>26/02/2023</a:t>
+              <a:t>27/02/2023</a:t>
             </a:fld>
             <a:endParaRPr lang="en-GB"/>
           </a:p>
@@ -2398,7 +2398,7 @@
           <a:p>
             <a:fld id="{9B2269BD-2009-45FD-BF20-0C7340CF9594}" type="datetimeFigureOut">
               <a:rPr lang="en-GB" smtClean="0"/>
-              <a:t>26/02/2023</a:t>
+              <a:t>27/02/2023</a:t>
             </a:fld>
             <a:endParaRPr lang="en-GB"/>
           </a:p>
@@ -2687,7 +2687,7 @@
           <a:p>
             <a:fld id="{9B2269BD-2009-45FD-BF20-0C7340CF9594}" type="datetimeFigureOut">
               <a:rPr lang="en-GB" smtClean="0"/>
-              <a:t>26/02/2023</a:t>
+              <a:t>27/02/2023</a:t>
             </a:fld>
             <a:endParaRPr lang="en-GB"/>
           </a:p>
@@ -2930,7 +2930,7 @@
           <a:p>
             <a:fld id="{9B2269BD-2009-45FD-BF20-0C7340CF9594}" type="datetimeFigureOut">
               <a:rPr lang="en-GB" smtClean="0"/>
-              <a:t>26/02/2023</a:t>
+              <a:t>27/02/2023</a:t>
             </a:fld>
             <a:endParaRPr lang="en-GB"/>
           </a:p>
@@ -3462,7 +3462,7 @@
           <p:spPr>
             <a:xfrm>
               <a:off x="3181819" y="4663098"/>
-              <a:ext cx="5378524" cy="1261884"/>
+              <a:ext cx="4762907" cy="1169551"/>
             </a:xfrm>
             <a:prstGeom prst="rect">
               <a:avLst/>
@@ -3482,27 +3482,27 @@
             </a:p>
             <a:p>
               <a:r>
-                <a:rPr lang="en-US" sz="1700" dirty="0"/>
+                <a:rPr lang="en-US" sz="1500" dirty="0"/>
                 <a:t>Associate</a:t>
               </a:r>
               <a:r>
-                <a:rPr lang="pt-BR" sz="1700" dirty="0"/>
+                <a:rPr lang="pt-BR" sz="1500" dirty="0"/>
                 <a:t> Professor</a:t>
               </a:r>
             </a:p>
             <a:p>
               <a:r>
-                <a:rPr lang="en-US" sz="1700" dirty="0"/>
+                <a:rPr lang="en-US" sz="1500" dirty="0"/>
                 <a:t>Department</a:t>
               </a:r>
               <a:r>
-                <a:rPr lang="en-GB" sz="1700" dirty="0"/>
+                <a:rPr lang="en-GB" sz="1500" dirty="0"/>
                 <a:t> of Mathematical and Computational Sciences,</a:t>
               </a:r>
             </a:p>
             <a:p>
               <a:r>
-                <a:rPr lang="en-GB" sz="1700" dirty="0"/>
+                <a:rPr lang="en-GB" sz="1500" dirty="0"/>
                 <a:t>Yachay Tech University - UITEY</a:t>
               </a:r>
             </a:p>
